--- a/C_Mail.pptx
+++ b/C_Mail.pptx
@@ -4235,7 +4235,7 @@
           <a:p>
             <a:fld id="{5B7A6947-1D5F-4625-BBD6-C20CA1DED950}" type="datetimeFigureOut">
               <a:rPr lang="de-AT" smtClean="0"/>
-              <a:t>17.10.2024</a:t>
+              <a:t>22.10.2024</a:t>
             </a:fld>
             <a:endParaRPr lang="de-AT"/>
           </a:p>
@@ -6502,7 +6502,7 @@
           <a:p>
             <a:fld id="{BEEA25B0-A6E4-438D-994D-F0372B8906A0}" type="datetimeFigureOut">
               <a:rPr lang="de-AT" smtClean="0"/>
-              <a:t>17.10.2024</a:t>
+              <a:t>22.10.2024</a:t>
             </a:fld>
             <a:endParaRPr lang="de-AT"/>
           </a:p>
@@ -6740,7 +6740,7 @@
           <a:p>
             <a:fld id="{BEEA25B0-A6E4-438D-994D-F0372B8906A0}" type="datetimeFigureOut">
               <a:rPr lang="de-AT" smtClean="0"/>
-              <a:t>17.10.2024</a:t>
+              <a:t>22.10.2024</a:t>
             </a:fld>
             <a:endParaRPr lang="de-AT"/>
           </a:p>
@@ -6920,7 +6920,7 @@
           <a:p>
             <a:fld id="{BEEA25B0-A6E4-438D-994D-F0372B8906A0}" type="datetimeFigureOut">
               <a:rPr lang="de-AT" smtClean="0"/>
-              <a:t>17.10.2024</a:t>
+              <a:t>22.10.2024</a:t>
             </a:fld>
             <a:endParaRPr lang="de-AT"/>
           </a:p>
@@ -7090,7 +7090,7 @@
           <a:p>
             <a:fld id="{BEEA25B0-A6E4-438D-994D-F0372B8906A0}" type="datetimeFigureOut">
               <a:rPr lang="de-AT" smtClean="0"/>
-              <a:t>17.10.2024</a:t>
+              <a:t>22.10.2024</a:t>
             </a:fld>
             <a:endParaRPr lang="de-AT"/>
           </a:p>
@@ -7366,7 +7366,7 @@
           <a:p>
             <a:fld id="{BEEA25B0-A6E4-438D-994D-F0372B8906A0}" type="datetimeFigureOut">
               <a:rPr lang="de-AT" smtClean="0"/>
-              <a:t>17.10.2024</a:t>
+              <a:t>22.10.2024</a:t>
             </a:fld>
             <a:endParaRPr lang="de-AT"/>
           </a:p>
@@ -8567,7 +8567,7 @@
           <a:p>
             <a:fld id="{BEEA25B0-A6E4-438D-994D-F0372B8906A0}" type="datetimeFigureOut">
               <a:rPr lang="de-AT" smtClean="0"/>
-              <a:t>17.10.2024</a:t>
+              <a:t>22.10.2024</a:t>
             </a:fld>
             <a:endParaRPr lang="de-AT"/>
           </a:p>
@@ -8957,7 +8957,7 @@
           <a:p>
             <a:fld id="{BEEA25B0-A6E4-438D-994D-F0372B8906A0}" type="datetimeFigureOut">
               <a:rPr lang="de-AT" smtClean="0"/>
-              <a:t>17.10.2024</a:t>
+              <a:t>22.10.2024</a:t>
             </a:fld>
             <a:endParaRPr lang="de-AT"/>
           </a:p>
@@ -9080,7 +9080,7 @@
           <a:p>
             <a:fld id="{BEEA25B0-A6E4-438D-994D-F0372B8906A0}" type="datetimeFigureOut">
               <a:rPr lang="de-AT" smtClean="0"/>
-              <a:t>17.10.2024</a:t>
+              <a:t>22.10.2024</a:t>
             </a:fld>
             <a:endParaRPr lang="de-AT"/>
           </a:p>
@@ -9175,7 +9175,7 @@
           <a:p>
             <a:fld id="{BEEA25B0-A6E4-438D-994D-F0372B8906A0}" type="datetimeFigureOut">
               <a:rPr lang="de-AT" smtClean="0"/>
-              <a:t>17.10.2024</a:t>
+              <a:t>22.10.2024</a:t>
             </a:fld>
             <a:endParaRPr lang="de-AT"/>
           </a:p>
@@ -9938,7 +9938,7 @@
           <a:p>
             <a:fld id="{BEEA25B0-A6E4-438D-994D-F0372B8906A0}" type="datetimeFigureOut">
               <a:rPr lang="de-AT" smtClean="0"/>
-              <a:t>17.10.2024</a:t>
+              <a:t>22.10.2024</a:t>
             </a:fld>
             <a:endParaRPr lang="de-AT"/>
           </a:p>
@@ -10778,7 +10778,7 @@
           <a:p>
             <a:fld id="{BEEA25B0-A6E4-438D-994D-F0372B8906A0}" type="datetimeFigureOut">
               <a:rPr lang="de-AT" smtClean="0"/>
-              <a:t>17.10.2024</a:t>
+              <a:t>22.10.2024</a:t>
             </a:fld>
             <a:endParaRPr lang="de-AT"/>
           </a:p>
@@ -11005,7 +11005,7 @@
           <a:p>
             <a:fld id="{BEEA25B0-A6E4-438D-994D-F0372B8906A0}" type="datetimeFigureOut">
               <a:rPr lang="de-AT" smtClean="0"/>
-              <a:t>17.10.2024</a:t>
+              <a:t>22.10.2024</a:t>
             </a:fld>
             <a:endParaRPr lang="de-AT"/>
           </a:p>
@@ -14026,7 +14026,7 @@
         </p:nvSpPr>
         <p:spPr>
           <a:xfrm>
-            <a:off x="1364011" y="1485634"/>
+            <a:off x="2115497" y="352574"/>
             <a:ext cx="788276" cy="788276"/>
           </a:xfrm>
           <a:prstGeom prst="rect">
@@ -14078,7 +14078,7 @@
         </p:nvSpPr>
         <p:spPr>
           <a:xfrm>
-            <a:off x="2152287" y="1485634"/>
+            <a:off x="2903773" y="352574"/>
             <a:ext cx="788276" cy="788276"/>
           </a:xfrm>
           <a:prstGeom prst="rect">
@@ -14130,7 +14130,7 @@
         </p:nvSpPr>
         <p:spPr>
           <a:xfrm>
-            <a:off x="3728839" y="1480379"/>
+            <a:off x="4480325" y="347319"/>
             <a:ext cx="788276" cy="788276"/>
           </a:xfrm>
           <a:prstGeom prst="rect">
@@ -14182,7 +14182,7 @@
         </p:nvSpPr>
         <p:spPr>
           <a:xfrm>
-            <a:off x="6755817" y="1480379"/>
+            <a:off x="7507303" y="347319"/>
             <a:ext cx="788276" cy="788276"/>
           </a:xfrm>
           <a:prstGeom prst="rect">
@@ -14234,7 +14234,7 @@
         </p:nvSpPr>
         <p:spPr>
           <a:xfrm>
-            <a:off x="7544093" y="1480379"/>
+            <a:off x="8295579" y="347319"/>
             <a:ext cx="788276" cy="788276"/>
           </a:xfrm>
           <a:prstGeom prst="rect">
@@ -14286,7 +14286,7 @@
         </p:nvSpPr>
         <p:spPr>
           <a:xfrm>
-            <a:off x="8332369" y="1480379"/>
+            <a:off x="9083855" y="347319"/>
             <a:ext cx="788276" cy="788276"/>
           </a:xfrm>
           <a:prstGeom prst="rect">
@@ -14338,7 +14338,7 @@
         </p:nvSpPr>
         <p:spPr>
           <a:xfrm>
-            <a:off x="9120645" y="1480379"/>
+            <a:off x="9872131" y="347319"/>
             <a:ext cx="788276" cy="788276"/>
           </a:xfrm>
           <a:prstGeom prst="rect">
@@ -14390,7 +14390,7 @@
         </p:nvSpPr>
         <p:spPr>
           <a:xfrm>
-            <a:off x="2940563" y="1485634"/>
+            <a:off x="3692049" y="352574"/>
             <a:ext cx="788276" cy="788276"/>
           </a:xfrm>
           <a:prstGeom prst="rect">
@@ -14444,7 +14444,7 @@
         </p:nvCxnSpPr>
         <p:spPr>
           <a:xfrm>
-            <a:off x="5268603" y="1871889"/>
+            <a:off x="6020089" y="738829"/>
             <a:ext cx="735724" cy="0"/>
           </a:xfrm>
           <a:prstGeom prst="straightConnector1">
@@ -14469,66 +14469,207 @@
           </a:fontRef>
         </p:style>
       </p:cxnSp>
-      <p:sp>
-        <p:nvSpPr>
-          <p:cNvPr id="3" name="Textfeld 2">
+      <p:pic>
+        <p:nvPicPr>
+          <p:cNvPr id="1026" name="Picture 2">
             <a:extLst>
               <a:ext uri="{FF2B5EF4-FFF2-40B4-BE49-F238E27FC236}">
-                <a16:creationId xmlns:a16="http://schemas.microsoft.com/office/drawing/2014/main" id="{5EE81C35-936C-4D8A-94B7-B3B0EA30709C}"/>
+                <a16:creationId xmlns:a16="http://schemas.microsoft.com/office/drawing/2014/main" id="{8235C388-B1ED-4666-8926-40806919EF23}"/>
               </a:ext>
             </a:extLst>
           </p:cNvPr>
-          <p:cNvSpPr txBox="1"/>
+          <p:cNvPicPr>
+            <a:picLocks noChangeAspect="1" noChangeArrowheads="1"/>
+          </p:cNvPicPr>
           <p:nvPr/>
-        </p:nvSpPr>
-        <p:spPr>
+        </p:nvPicPr>
+        <p:blipFill>
+          <a:blip r:embed="rId3">
+            <a:extLst>
+              <a:ext uri="{28A0092B-C50C-407E-A947-70E740481C1C}">
+                <a14:useLocalDpi xmlns:a14="http://schemas.microsoft.com/office/drawing/2010/main" val="0"/>
+              </a:ext>
+            </a:extLst>
+          </a:blip>
+          <a:srcRect/>
+          <a:stretch>
+            <a:fillRect/>
+          </a:stretch>
+        </p:blipFill>
+        <p:spPr bwMode="auto">
           <a:xfrm>
-            <a:off x="1364011" y="2633133"/>
-            <a:ext cx="9761189" cy="369332"/>
+            <a:off x="2115497" y="1228314"/>
+            <a:ext cx="3153104" cy="1778572"/>
           </a:xfrm>
           <a:prstGeom prst="rect">
             <a:avLst/>
           </a:prstGeom>
           <a:noFill/>
+          <a:extLst>
+            <a:ext uri="{909E8E84-426E-40DD-AFC4-6F175D3DCCD1}">
+              <a14:hiddenFill xmlns:a14="http://schemas.microsoft.com/office/drawing/2010/main">
+                <a:solidFill>
+                  <a:srgbClr val="FFFFFF"/>
+                </a:solidFill>
+              </a14:hiddenFill>
+            </a:ext>
+          </a:extLst>
         </p:spPr>
-        <p:txBody>
-          <a:bodyPr wrap="square" rtlCol="0">
-            <a:spAutoFit/>
-          </a:bodyPr>
-          <a:lstStyle/>
-          <a:p>
-            <a:r>
-              <a:rPr lang="de-DE" dirty="0">
+      </p:pic>
+      <p:pic>
+        <p:nvPicPr>
+          <p:cNvPr id="1028" name="Picture 4">
+            <a:extLst>
+              <a:ext uri="{FF2B5EF4-FFF2-40B4-BE49-F238E27FC236}">
+                <a16:creationId xmlns:a16="http://schemas.microsoft.com/office/drawing/2014/main" id="{E9EC189A-FB9E-45D1-B903-78BF72BC9082}"/>
+              </a:ext>
+            </a:extLst>
+          </p:cNvPr>
+          <p:cNvPicPr>
+            <a:picLocks noChangeAspect="1" noChangeArrowheads="1"/>
+          </p:cNvPicPr>
+          <p:nvPr/>
+        </p:nvPicPr>
+        <p:blipFill>
+          <a:blip r:embed="rId4">
+            <a:extLst>
+              <a:ext uri="{28A0092B-C50C-407E-A947-70E740481C1C}">
+                <a14:useLocalDpi xmlns:a14="http://schemas.microsoft.com/office/drawing/2010/main" val="0"/>
+              </a:ext>
+            </a:extLst>
+          </a:blip>
+          <a:srcRect/>
+          <a:stretch>
+            <a:fillRect/>
+          </a:stretch>
+        </p:blipFill>
+        <p:spPr bwMode="auto">
+          <a:xfrm>
+            <a:off x="2115495" y="3006887"/>
+            <a:ext cx="3153105" cy="1762526"/>
+          </a:xfrm>
+          <a:prstGeom prst="rect">
+            <a:avLst/>
+          </a:prstGeom>
+          <a:noFill/>
+          <a:extLst>
+            <a:ext uri="{909E8E84-426E-40DD-AFC4-6F175D3DCCD1}">
+              <a14:hiddenFill xmlns:a14="http://schemas.microsoft.com/office/drawing/2010/main">
                 <a:solidFill>
-                  <a:srgbClr val="FF0000"/>
+                  <a:srgbClr val="FFFFFF"/>
                 </a:solidFill>
-              </a:rPr>
-              <a:t>Hier passende </a:t>
-            </a:r>
-            <a:r>
-              <a:rPr lang="de-DE" dirty="0" err="1">
+              </a14:hiddenFill>
+            </a:ext>
+          </a:extLst>
+        </p:spPr>
+      </p:pic>
+      <p:pic>
+        <p:nvPicPr>
+          <p:cNvPr id="1030" name="Picture 6">
+            <a:extLst>
+              <a:ext uri="{FF2B5EF4-FFF2-40B4-BE49-F238E27FC236}">
+                <a16:creationId xmlns:a16="http://schemas.microsoft.com/office/drawing/2014/main" id="{B3F94E2A-E6DA-4286-9931-2EFD83F4A892}"/>
+              </a:ext>
+            </a:extLst>
+          </p:cNvPr>
+          <p:cNvPicPr>
+            <a:picLocks noChangeAspect="1" noChangeArrowheads="1"/>
+          </p:cNvPicPr>
+          <p:nvPr/>
+        </p:nvPicPr>
+        <p:blipFill>
+          <a:blip r:embed="rId5">
+            <a:extLst>
+              <a:ext uri="{28A0092B-C50C-407E-A947-70E740481C1C}">
+                <a14:useLocalDpi xmlns:a14="http://schemas.microsoft.com/office/drawing/2010/main" val="0"/>
+              </a:ext>
+            </a:extLst>
+          </a:blip>
+          <a:srcRect/>
+          <a:stretch>
+            <a:fillRect/>
+          </a:stretch>
+        </p:blipFill>
+        <p:spPr bwMode="auto">
+          <a:xfrm>
+            <a:off x="2115494" y="4769413"/>
+            <a:ext cx="3153103" cy="1782533"/>
+          </a:xfrm>
+          <a:prstGeom prst="rect">
+            <a:avLst/>
+          </a:prstGeom>
+          <a:noFill/>
+          <a:extLst>
+            <a:ext uri="{909E8E84-426E-40DD-AFC4-6F175D3DCCD1}">
+              <a14:hiddenFill xmlns:a14="http://schemas.microsoft.com/office/drawing/2010/main">
                 <a:solidFill>
-                  <a:srgbClr val="FF0000"/>
+                  <a:srgbClr val="FFFFFF"/>
                 </a:solidFill>
-              </a:rPr>
-              <a:t>screenshots</a:t>
-            </a:r>
-            <a:r>
-              <a:rPr lang="de-DE" dirty="0">
-                <a:solidFill>
-                  <a:srgbClr val="FF0000"/>
-                </a:solidFill>
-              </a:rPr>
-              <a:t>…</a:t>
-            </a:r>
-            <a:endParaRPr lang="de-AT" dirty="0">
-              <a:solidFill>
-                <a:srgbClr val="FF0000"/>
-              </a:solidFill>
-            </a:endParaRPr>
-          </a:p>
-        </p:txBody>
-      </p:sp>
+              </a14:hiddenFill>
+            </a:ext>
+          </a:extLst>
+        </p:spPr>
+      </p:pic>
+      <p:pic>
+        <p:nvPicPr>
+          <p:cNvPr id="12" name="Grafik 11">
+            <a:extLst>
+              <a:ext uri="{FF2B5EF4-FFF2-40B4-BE49-F238E27FC236}">
+                <a16:creationId xmlns:a16="http://schemas.microsoft.com/office/drawing/2014/main" id="{6982FCCB-FD10-41AB-A74B-B6488A21A809}"/>
+              </a:ext>
+            </a:extLst>
+          </p:cNvPr>
+          <p:cNvPicPr>
+            <a:picLocks noChangeAspect="1"/>
+          </p:cNvPicPr>
+          <p:nvPr/>
+        </p:nvPicPr>
+        <p:blipFill>
+          <a:blip r:embed="rId6"/>
+          <a:stretch>
+            <a:fillRect/>
+          </a:stretch>
+        </p:blipFill>
+        <p:spPr>
+          <a:xfrm>
+            <a:off x="7507304" y="1228314"/>
+            <a:ext cx="3153104" cy="1773620"/>
+          </a:xfrm>
+          <a:prstGeom prst="rect">
+            <a:avLst/>
+          </a:prstGeom>
+        </p:spPr>
+      </p:pic>
+      <p:pic>
+        <p:nvPicPr>
+          <p:cNvPr id="15" name="Grafik 14">
+            <a:extLst>
+              <a:ext uri="{FF2B5EF4-FFF2-40B4-BE49-F238E27FC236}">
+                <a16:creationId xmlns:a16="http://schemas.microsoft.com/office/drawing/2014/main" id="{99B1CC63-BFB8-4BA7-86CD-30FFEF6153C6}"/>
+              </a:ext>
+            </a:extLst>
+          </p:cNvPr>
+          <p:cNvPicPr>
+            <a:picLocks noChangeAspect="1"/>
+          </p:cNvPicPr>
+          <p:nvPr/>
+        </p:nvPicPr>
+        <p:blipFill>
+          <a:blip r:embed="rId7"/>
+          <a:stretch>
+            <a:fillRect/>
+          </a:stretch>
+        </p:blipFill>
+        <p:spPr>
+          <a:xfrm>
+            <a:off x="7429356" y="4734480"/>
+            <a:ext cx="3231051" cy="1817466"/>
+          </a:xfrm>
+          <a:prstGeom prst="rect">
+            <a:avLst/>
+          </a:prstGeom>
+        </p:spPr>
+      </p:pic>
     </p:spTree>
     <p:extLst>
       <p:ext uri="{BB962C8B-B14F-4D97-AF65-F5344CB8AC3E}">

--- a/C_Mail.pptx
+++ b/C_Mail.pptx
@@ -14428,47 +14428,6 @@
           </a:p>
         </p:txBody>
       </p:sp>
-      <p:cxnSp>
-        <p:nvCxnSpPr>
-          <p:cNvPr id="13" name="Gerade Verbindung mit Pfeil 12">
-            <a:extLst>
-              <a:ext uri="{FF2B5EF4-FFF2-40B4-BE49-F238E27FC236}">
-                <a16:creationId xmlns:a16="http://schemas.microsoft.com/office/drawing/2014/main" id="{2BB51266-9388-492B-B2E1-8C2A4E4AF6DC}"/>
-              </a:ext>
-            </a:extLst>
-          </p:cNvPr>
-          <p:cNvCxnSpPr>
-            <a:cxnSpLocks/>
-          </p:cNvCxnSpPr>
-          <p:nvPr/>
-        </p:nvCxnSpPr>
-        <p:spPr>
-          <a:xfrm>
-            <a:off x="6020089" y="738829"/>
-            <a:ext cx="735724" cy="0"/>
-          </a:xfrm>
-          <a:prstGeom prst="straightConnector1">
-            <a:avLst/>
-          </a:prstGeom>
-          <a:ln>
-            <a:tailEnd type="triangle"/>
-          </a:ln>
-        </p:spPr>
-        <p:style>
-          <a:lnRef idx="1">
-            <a:schemeClr val="dk1"/>
-          </a:lnRef>
-          <a:fillRef idx="0">
-            <a:schemeClr val="dk1"/>
-          </a:fillRef>
-          <a:effectRef idx="0">
-            <a:schemeClr val="dk1"/>
-          </a:effectRef>
-          <a:fontRef idx="minor">
-            <a:schemeClr val="tx1"/>
-          </a:fontRef>
-        </p:style>
-      </p:cxnSp>
       <p:pic>
         <p:nvPicPr>
           <p:cNvPr id="1026" name="Picture 2">
@@ -14642,10 +14601,10 @@
       </p:pic>
       <p:pic>
         <p:nvPicPr>
-          <p:cNvPr id="15" name="Grafik 14">
+          <p:cNvPr id="3" name="Grafik 2">
             <a:extLst>
               <a:ext uri="{FF2B5EF4-FFF2-40B4-BE49-F238E27FC236}">
-                <a16:creationId xmlns:a16="http://schemas.microsoft.com/office/drawing/2014/main" id="{99B1CC63-BFB8-4BA7-86CD-30FFEF6153C6}"/>
+                <a16:creationId xmlns:a16="http://schemas.microsoft.com/office/drawing/2014/main" id="{780C696B-742C-4344-85D3-CBD6035C80B1}"/>
               </a:ext>
             </a:extLst>
           </p:cNvPr>
@@ -14662,14 +14621,83 @@
         </p:blipFill>
         <p:spPr>
           <a:xfrm>
-            <a:off x="7429356" y="4734480"/>
-            <a:ext cx="3231051" cy="1817466"/>
+            <a:off x="7507303" y="3001934"/>
+            <a:ext cx="3153104" cy="1773621"/>
           </a:xfrm>
           <a:prstGeom prst="rect">
             <a:avLst/>
           </a:prstGeom>
         </p:spPr>
       </p:pic>
+      <p:pic>
+        <p:nvPicPr>
+          <p:cNvPr id="16" name="Grafik 15">
+            <a:extLst>
+              <a:ext uri="{FF2B5EF4-FFF2-40B4-BE49-F238E27FC236}">
+                <a16:creationId xmlns:a16="http://schemas.microsoft.com/office/drawing/2014/main" id="{F4E9EFF6-3992-4FD1-8719-9E021AF30E31}"/>
+              </a:ext>
+            </a:extLst>
+          </p:cNvPr>
+          <p:cNvPicPr>
+            <a:picLocks noChangeAspect="1"/>
+          </p:cNvPicPr>
+          <p:nvPr/>
+        </p:nvPicPr>
+        <p:blipFill>
+          <a:blip r:embed="rId8"/>
+          <a:stretch>
+            <a:fillRect/>
+          </a:stretch>
+        </p:blipFill>
+        <p:spPr>
+          <a:xfrm>
+            <a:off x="7509779" y="4769413"/>
+            <a:ext cx="3150628" cy="1772228"/>
+          </a:xfrm>
+          <a:prstGeom prst="rect">
+            <a:avLst/>
+          </a:prstGeom>
+        </p:spPr>
+      </p:pic>
+      <p:cxnSp>
+        <p:nvCxnSpPr>
+          <p:cNvPr id="21" name="Gerade Verbindung mit Pfeil 20">
+            <a:extLst>
+              <a:ext uri="{FF2B5EF4-FFF2-40B4-BE49-F238E27FC236}">
+                <a16:creationId xmlns:a16="http://schemas.microsoft.com/office/drawing/2014/main" id="{A9260E54-4ED0-4193-B72A-E25BC7E3451A}"/>
+              </a:ext>
+            </a:extLst>
+          </p:cNvPr>
+          <p:cNvCxnSpPr/>
+          <p:nvPr/>
+        </p:nvCxnSpPr>
+        <p:spPr>
+          <a:xfrm>
+            <a:off x="5724939" y="3429000"/>
+            <a:ext cx="1341783" cy="0"/>
+          </a:xfrm>
+          <a:prstGeom prst="straightConnector1">
+            <a:avLst/>
+          </a:prstGeom>
+          <a:ln>
+            <a:tailEnd type="triangle"/>
+          </a:ln>
+        </p:spPr>
+        <p:style>
+          <a:lnRef idx="1">
+            <a:schemeClr val="dk1"/>
+          </a:lnRef>
+          <a:fillRef idx="0">
+            <a:schemeClr val="dk1"/>
+          </a:fillRef>
+          <a:effectRef idx="0">
+            <a:schemeClr val="dk1"/>
+          </a:effectRef>
+          <a:fontRef idx="minor">
+            <a:schemeClr val="tx1"/>
+          </a:fontRef>
+        </p:style>
+      </p:cxnSp>
     </p:spTree>
     <p:extLst>
       <p:ext uri="{BB962C8B-B14F-4D97-AF65-F5344CB8AC3E}">

--- a/C_Mail.pptx
+++ b/C_Mail.pptx
@@ -5,7 +5,7 @@
     <p:sldMasterId id="2147483672" r:id="rId1"/>
   </p:sldMasterIdLst>
   <p:notesMasterIdLst>
-    <p:notesMasterId r:id="rId20"/>
+    <p:notesMasterId r:id="rId21"/>
   </p:notesMasterIdLst>
   <p:sldIdLst>
     <p:sldId id="256" r:id="rId2"/>
@@ -24,8 +24,9 @@
     <p:sldId id="272" r:id="rId15"/>
     <p:sldId id="269" r:id="rId16"/>
     <p:sldId id="270" r:id="rId17"/>
-    <p:sldId id="262" r:id="rId18"/>
-    <p:sldId id="261" r:id="rId19"/>
+    <p:sldId id="278" r:id="rId18"/>
+    <p:sldId id="262" r:id="rId19"/>
+    <p:sldId id="261" r:id="rId20"/>
   </p:sldIdLst>
   <p:sldSz cx="12192000" cy="6858000"/>
   <p:notesSz cx="6858000" cy="9144000"/>
@@ -4572,7 +4573,7 @@
           <a:p>
             <a:fld id="{FF719106-3219-44FA-A2A9-3D33F309A6FB}" type="slidenum">
               <a:rPr lang="de-AT" smtClean="0"/>
-              <a:t>3</a:t>
+              <a:t>2</a:t>
             </a:fld>
             <a:endParaRPr lang="de-AT"/>
           </a:p>
@@ -4581,7 +4582,535 @@
     </p:spTree>
     <p:extLst>
       <p:ext uri="{BB962C8B-B14F-4D97-AF65-F5344CB8AC3E}">
-        <p14:creationId xmlns:p14="http://schemas.microsoft.com/office/powerpoint/2010/main" val="87218196"/>
+        <p14:creationId xmlns:p14="http://schemas.microsoft.com/office/powerpoint/2010/main" val="2070599082"/>
+      </p:ext>
+    </p:extLst>
+  </p:cSld>
+  <p:clrMapOvr>
+    <a:masterClrMapping/>
+  </p:clrMapOvr>
+</p:notes>
+</file>
+
+<file path=ppt/notesSlides/notesSlide10.xml><?xml version="1.0" encoding="utf-8"?>
+<p:notes xmlns:a="http://schemas.openxmlformats.org/drawingml/2006/main" xmlns:r="http://schemas.openxmlformats.org/officeDocument/2006/relationships" xmlns:p="http://schemas.openxmlformats.org/presentationml/2006/main">
+  <p:cSld>
+    <p:spTree>
+      <p:nvGrpSpPr>
+        <p:cNvPr id="1" name=""/>
+        <p:cNvGrpSpPr/>
+        <p:nvPr/>
+      </p:nvGrpSpPr>
+      <p:grpSpPr>
+        <a:xfrm>
+          <a:off x="0" y="0"/>
+          <a:ext cx="0" cy="0"/>
+          <a:chOff x="0" y="0"/>
+          <a:chExt cx="0" cy="0"/>
+        </a:xfrm>
+      </p:grpSpPr>
+      <p:sp>
+        <p:nvSpPr>
+          <p:cNvPr id="2" name="Folienbildplatzhalter 1"/>
+          <p:cNvSpPr>
+            <a:spLocks noGrp="1" noRot="1" noChangeAspect="1"/>
+          </p:cNvSpPr>
+          <p:nvPr>
+            <p:ph type="sldImg"/>
+          </p:nvPr>
+        </p:nvSpPr>
+        <p:spPr/>
+      </p:sp>
+      <p:sp>
+        <p:nvSpPr>
+          <p:cNvPr id="3" name="Notizenplatzhalter 2"/>
+          <p:cNvSpPr>
+            <a:spLocks noGrp="1"/>
+          </p:cNvSpPr>
+          <p:nvPr>
+            <p:ph type="body" idx="1"/>
+          </p:nvPr>
+        </p:nvSpPr>
+        <p:spPr/>
+        <p:txBody>
+          <a:bodyPr/>
+          <a:lstStyle/>
+          <a:p>
+            <a:r>
+              <a:rPr lang="de-DE" dirty="0"/>
+              <a:t>Jasmin</a:t>
+            </a:r>
+            <a:endParaRPr lang="de-AT" dirty="0"/>
+          </a:p>
+        </p:txBody>
+      </p:sp>
+      <p:sp>
+        <p:nvSpPr>
+          <p:cNvPr id="4" name="Foliennummernplatzhalter 3"/>
+          <p:cNvSpPr>
+            <a:spLocks noGrp="1"/>
+          </p:cNvSpPr>
+          <p:nvPr>
+            <p:ph type="sldNum" sz="quarter" idx="5"/>
+          </p:nvPr>
+        </p:nvSpPr>
+        <p:spPr/>
+        <p:txBody>
+          <a:bodyPr/>
+          <a:lstStyle/>
+          <a:p>
+            <a:fld id="{FF719106-3219-44FA-A2A9-3D33F309A6FB}" type="slidenum">
+              <a:rPr lang="de-AT" smtClean="0"/>
+              <a:t>11</a:t>
+            </a:fld>
+            <a:endParaRPr lang="de-AT"/>
+          </a:p>
+        </p:txBody>
+      </p:sp>
+    </p:spTree>
+    <p:extLst>
+      <p:ext uri="{BB962C8B-B14F-4D97-AF65-F5344CB8AC3E}">
+        <p14:creationId xmlns:p14="http://schemas.microsoft.com/office/powerpoint/2010/main" val="703682576"/>
+      </p:ext>
+    </p:extLst>
+  </p:cSld>
+  <p:clrMapOvr>
+    <a:masterClrMapping/>
+  </p:clrMapOvr>
+</p:notes>
+</file>
+
+<file path=ppt/notesSlides/notesSlide11.xml><?xml version="1.0" encoding="utf-8"?>
+<p:notes xmlns:a="http://schemas.openxmlformats.org/drawingml/2006/main" xmlns:r="http://schemas.openxmlformats.org/officeDocument/2006/relationships" xmlns:p="http://schemas.openxmlformats.org/presentationml/2006/main">
+  <p:cSld>
+    <p:spTree>
+      <p:nvGrpSpPr>
+        <p:cNvPr id="1" name=""/>
+        <p:cNvGrpSpPr/>
+        <p:nvPr/>
+      </p:nvGrpSpPr>
+      <p:grpSpPr>
+        <a:xfrm>
+          <a:off x="0" y="0"/>
+          <a:ext cx="0" cy="0"/>
+          <a:chOff x="0" y="0"/>
+          <a:chExt cx="0" cy="0"/>
+        </a:xfrm>
+      </p:grpSpPr>
+      <p:sp>
+        <p:nvSpPr>
+          <p:cNvPr id="2" name="Folienbildplatzhalter 1"/>
+          <p:cNvSpPr>
+            <a:spLocks noGrp="1" noRot="1" noChangeAspect="1"/>
+          </p:cNvSpPr>
+          <p:nvPr>
+            <p:ph type="sldImg"/>
+          </p:nvPr>
+        </p:nvSpPr>
+        <p:spPr/>
+      </p:sp>
+      <p:sp>
+        <p:nvSpPr>
+          <p:cNvPr id="3" name="Notizenplatzhalter 2"/>
+          <p:cNvSpPr>
+            <a:spLocks noGrp="1"/>
+          </p:cNvSpPr>
+          <p:nvPr>
+            <p:ph type="body" idx="1"/>
+          </p:nvPr>
+        </p:nvSpPr>
+        <p:spPr/>
+        <p:txBody>
+          <a:bodyPr/>
+          <a:lstStyle/>
+          <a:p>
+            <a:r>
+              <a:rPr lang="de-DE" dirty="0"/>
+              <a:t>Jasmin</a:t>
+            </a:r>
+            <a:endParaRPr lang="de-AT" dirty="0"/>
+          </a:p>
+        </p:txBody>
+      </p:sp>
+      <p:sp>
+        <p:nvSpPr>
+          <p:cNvPr id="4" name="Foliennummernplatzhalter 3"/>
+          <p:cNvSpPr>
+            <a:spLocks noGrp="1"/>
+          </p:cNvSpPr>
+          <p:nvPr>
+            <p:ph type="sldNum" sz="quarter" idx="5"/>
+          </p:nvPr>
+        </p:nvSpPr>
+        <p:spPr/>
+        <p:txBody>
+          <a:bodyPr/>
+          <a:lstStyle/>
+          <a:p>
+            <a:fld id="{FF719106-3219-44FA-A2A9-3D33F309A6FB}" type="slidenum">
+              <a:rPr lang="de-AT" smtClean="0"/>
+              <a:t>12</a:t>
+            </a:fld>
+            <a:endParaRPr lang="de-AT"/>
+          </a:p>
+        </p:txBody>
+      </p:sp>
+    </p:spTree>
+    <p:extLst>
+      <p:ext uri="{BB962C8B-B14F-4D97-AF65-F5344CB8AC3E}">
+        <p14:creationId xmlns:p14="http://schemas.microsoft.com/office/powerpoint/2010/main" val="2319155447"/>
+      </p:ext>
+    </p:extLst>
+  </p:cSld>
+  <p:clrMapOvr>
+    <a:masterClrMapping/>
+  </p:clrMapOvr>
+</p:notes>
+</file>
+
+<file path=ppt/notesSlides/notesSlide12.xml><?xml version="1.0" encoding="utf-8"?>
+<p:notes xmlns:a="http://schemas.openxmlformats.org/drawingml/2006/main" xmlns:r="http://schemas.openxmlformats.org/officeDocument/2006/relationships" xmlns:p="http://schemas.openxmlformats.org/presentationml/2006/main">
+  <p:cSld>
+    <p:spTree>
+      <p:nvGrpSpPr>
+        <p:cNvPr id="1" name=""/>
+        <p:cNvGrpSpPr/>
+        <p:nvPr/>
+      </p:nvGrpSpPr>
+      <p:grpSpPr>
+        <a:xfrm>
+          <a:off x="0" y="0"/>
+          <a:ext cx="0" cy="0"/>
+          <a:chOff x="0" y="0"/>
+          <a:chExt cx="0" cy="0"/>
+        </a:xfrm>
+      </p:grpSpPr>
+      <p:sp>
+        <p:nvSpPr>
+          <p:cNvPr id="2" name="Folienbildplatzhalter 1"/>
+          <p:cNvSpPr>
+            <a:spLocks noGrp="1" noRot="1" noChangeAspect="1"/>
+          </p:cNvSpPr>
+          <p:nvPr>
+            <p:ph type="sldImg"/>
+          </p:nvPr>
+        </p:nvSpPr>
+        <p:spPr/>
+      </p:sp>
+      <p:sp>
+        <p:nvSpPr>
+          <p:cNvPr id="3" name="Notizenplatzhalter 2"/>
+          <p:cNvSpPr>
+            <a:spLocks noGrp="1"/>
+          </p:cNvSpPr>
+          <p:nvPr>
+            <p:ph type="body" idx="1"/>
+          </p:nvPr>
+        </p:nvSpPr>
+        <p:spPr/>
+        <p:txBody>
+          <a:bodyPr/>
+          <a:lstStyle/>
+          <a:p>
+            <a:r>
+              <a:rPr lang="de-DE" dirty="0"/>
+              <a:t>Jasmin</a:t>
+            </a:r>
+            <a:endParaRPr lang="de-AT" dirty="0"/>
+          </a:p>
+        </p:txBody>
+      </p:sp>
+      <p:sp>
+        <p:nvSpPr>
+          <p:cNvPr id="4" name="Foliennummernplatzhalter 3"/>
+          <p:cNvSpPr>
+            <a:spLocks noGrp="1"/>
+          </p:cNvSpPr>
+          <p:nvPr>
+            <p:ph type="sldNum" sz="quarter" idx="5"/>
+          </p:nvPr>
+        </p:nvSpPr>
+        <p:spPr/>
+        <p:txBody>
+          <a:bodyPr/>
+          <a:lstStyle/>
+          <a:p>
+            <a:fld id="{FF719106-3219-44FA-A2A9-3D33F309A6FB}" type="slidenum">
+              <a:rPr lang="de-AT" smtClean="0"/>
+              <a:t>13</a:t>
+            </a:fld>
+            <a:endParaRPr lang="de-AT"/>
+          </a:p>
+        </p:txBody>
+      </p:sp>
+    </p:spTree>
+    <p:extLst>
+      <p:ext uri="{BB962C8B-B14F-4D97-AF65-F5344CB8AC3E}">
+        <p14:creationId xmlns:p14="http://schemas.microsoft.com/office/powerpoint/2010/main" val="2639180382"/>
+      </p:ext>
+    </p:extLst>
+  </p:cSld>
+  <p:clrMapOvr>
+    <a:masterClrMapping/>
+  </p:clrMapOvr>
+</p:notes>
+</file>
+
+<file path=ppt/notesSlides/notesSlide13.xml><?xml version="1.0" encoding="utf-8"?>
+<p:notes xmlns:a="http://schemas.openxmlformats.org/drawingml/2006/main" xmlns:r="http://schemas.openxmlformats.org/officeDocument/2006/relationships" xmlns:p="http://schemas.openxmlformats.org/presentationml/2006/main">
+  <p:cSld>
+    <p:spTree>
+      <p:nvGrpSpPr>
+        <p:cNvPr id="1" name=""/>
+        <p:cNvGrpSpPr/>
+        <p:nvPr/>
+      </p:nvGrpSpPr>
+      <p:grpSpPr>
+        <a:xfrm>
+          <a:off x="0" y="0"/>
+          <a:ext cx="0" cy="0"/>
+          <a:chOff x="0" y="0"/>
+          <a:chExt cx="0" cy="0"/>
+        </a:xfrm>
+      </p:grpSpPr>
+      <p:sp>
+        <p:nvSpPr>
+          <p:cNvPr id="2" name="Folienbildplatzhalter 1"/>
+          <p:cNvSpPr>
+            <a:spLocks noGrp="1" noRot="1" noChangeAspect="1"/>
+          </p:cNvSpPr>
+          <p:nvPr>
+            <p:ph type="sldImg"/>
+          </p:nvPr>
+        </p:nvSpPr>
+        <p:spPr/>
+      </p:sp>
+      <p:sp>
+        <p:nvSpPr>
+          <p:cNvPr id="3" name="Notizenplatzhalter 2"/>
+          <p:cNvSpPr>
+            <a:spLocks noGrp="1"/>
+          </p:cNvSpPr>
+          <p:nvPr>
+            <p:ph type="body" idx="1"/>
+          </p:nvPr>
+        </p:nvSpPr>
+        <p:spPr/>
+        <p:txBody>
+          <a:bodyPr/>
+          <a:lstStyle/>
+          <a:p>
+            <a:r>
+              <a:rPr lang="de-DE" dirty="0"/>
+              <a:t>Caroline</a:t>
+            </a:r>
+            <a:endParaRPr lang="de-AT" dirty="0"/>
+          </a:p>
+        </p:txBody>
+      </p:sp>
+      <p:sp>
+        <p:nvSpPr>
+          <p:cNvPr id="4" name="Foliennummernplatzhalter 3"/>
+          <p:cNvSpPr>
+            <a:spLocks noGrp="1"/>
+          </p:cNvSpPr>
+          <p:nvPr>
+            <p:ph type="sldNum" sz="quarter" idx="5"/>
+          </p:nvPr>
+        </p:nvSpPr>
+        <p:spPr/>
+        <p:txBody>
+          <a:bodyPr/>
+          <a:lstStyle/>
+          <a:p>
+            <a:fld id="{FF719106-3219-44FA-A2A9-3D33F309A6FB}" type="slidenum">
+              <a:rPr lang="de-AT" smtClean="0"/>
+              <a:t>17</a:t>
+            </a:fld>
+            <a:endParaRPr lang="de-AT"/>
+          </a:p>
+        </p:txBody>
+      </p:sp>
+    </p:spTree>
+    <p:extLst>
+      <p:ext uri="{BB962C8B-B14F-4D97-AF65-F5344CB8AC3E}">
+        <p14:creationId xmlns:p14="http://schemas.microsoft.com/office/powerpoint/2010/main" val="3722955790"/>
+      </p:ext>
+    </p:extLst>
+  </p:cSld>
+  <p:clrMapOvr>
+    <a:masterClrMapping/>
+  </p:clrMapOvr>
+</p:notes>
+</file>
+
+<file path=ppt/notesSlides/notesSlide14.xml><?xml version="1.0" encoding="utf-8"?>
+<p:notes xmlns:a="http://schemas.openxmlformats.org/drawingml/2006/main" xmlns:r="http://schemas.openxmlformats.org/officeDocument/2006/relationships" xmlns:p="http://schemas.openxmlformats.org/presentationml/2006/main">
+  <p:cSld>
+    <p:spTree>
+      <p:nvGrpSpPr>
+        <p:cNvPr id="1" name=""/>
+        <p:cNvGrpSpPr/>
+        <p:nvPr/>
+      </p:nvGrpSpPr>
+      <p:grpSpPr>
+        <a:xfrm>
+          <a:off x="0" y="0"/>
+          <a:ext cx="0" cy="0"/>
+          <a:chOff x="0" y="0"/>
+          <a:chExt cx="0" cy="0"/>
+        </a:xfrm>
+      </p:grpSpPr>
+      <p:sp>
+        <p:nvSpPr>
+          <p:cNvPr id="2" name="Folienbildplatzhalter 1"/>
+          <p:cNvSpPr>
+            <a:spLocks noGrp="1" noRot="1" noChangeAspect="1"/>
+          </p:cNvSpPr>
+          <p:nvPr>
+            <p:ph type="sldImg"/>
+          </p:nvPr>
+        </p:nvSpPr>
+        <p:spPr/>
+      </p:sp>
+      <p:sp>
+        <p:nvSpPr>
+          <p:cNvPr id="3" name="Notizenplatzhalter 2"/>
+          <p:cNvSpPr>
+            <a:spLocks noGrp="1"/>
+          </p:cNvSpPr>
+          <p:nvPr>
+            <p:ph type="body" idx="1"/>
+          </p:nvPr>
+        </p:nvSpPr>
+        <p:spPr/>
+        <p:txBody>
+          <a:bodyPr/>
+          <a:lstStyle/>
+          <a:p>
+            <a:r>
+              <a:rPr lang="de-DE" dirty="0"/>
+              <a:t>Caroline</a:t>
+            </a:r>
+            <a:endParaRPr lang="de-AT" dirty="0"/>
+          </a:p>
+        </p:txBody>
+      </p:sp>
+      <p:sp>
+        <p:nvSpPr>
+          <p:cNvPr id="4" name="Foliennummernplatzhalter 3"/>
+          <p:cNvSpPr>
+            <a:spLocks noGrp="1"/>
+          </p:cNvSpPr>
+          <p:nvPr>
+            <p:ph type="sldNum" sz="quarter" idx="5"/>
+          </p:nvPr>
+        </p:nvSpPr>
+        <p:spPr/>
+        <p:txBody>
+          <a:bodyPr/>
+          <a:lstStyle/>
+          <a:p>
+            <a:fld id="{FF719106-3219-44FA-A2A9-3D33F309A6FB}" type="slidenum">
+              <a:rPr lang="de-AT" smtClean="0"/>
+              <a:t>18</a:t>
+            </a:fld>
+            <a:endParaRPr lang="de-AT"/>
+          </a:p>
+        </p:txBody>
+      </p:sp>
+    </p:spTree>
+    <p:extLst>
+      <p:ext uri="{BB962C8B-B14F-4D97-AF65-F5344CB8AC3E}">
+        <p14:creationId xmlns:p14="http://schemas.microsoft.com/office/powerpoint/2010/main" val="716496874"/>
+      </p:ext>
+    </p:extLst>
+  </p:cSld>
+  <p:clrMapOvr>
+    <a:masterClrMapping/>
+  </p:clrMapOvr>
+</p:notes>
+</file>
+
+<file path=ppt/notesSlides/notesSlide15.xml><?xml version="1.0" encoding="utf-8"?>
+<p:notes xmlns:a="http://schemas.openxmlformats.org/drawingml/2006/main" xmlns:r="http://schemas.openxmlformats.org/officeDocument/2006/relationships" xmlns:p="http://schemas.openxmlformats.org/presentationml/2006/main">
+  <p:cSld>
+    <p:spTree>
+      <p:nvGrpSpPr>
+        <p:cNvPr id="1" name=""/>
+        <p:cNvGrpSpPr/>
+        <p:nvPr/>
+      </p:nvGrpSpPr>
+      <p:grpSpPr>
+        <a:xfrm>
+          <a:off x="0" y="0"/>
+          <a:ext cx="0" cy="0"/>
+          <a:chOff x="0" y="0"/>
+          <a:chExt cx="0" cy="0"/>
+        </a:xfrm>
+      </p:grpSpPr>
+      <p:sp>
+        <p:nvSpPr>
+          <p:cNvPr id="2" name="Folienbildplatzhalter 1"/>
+          <p:cNvSpPr>
+            <a:spLocks noGrp="1" noRot="1" noChangeAspect="1"/>
+          </p:cNvSpPr>
+          <p:nvPr>
+            <p:ph type="sldImg"/>
+          </p:nvPr>
+        </p:nvSpPr>
+        <p:spPr/>
+      </p:sp>
+      <p:sp>
+        <p:nvSpPr>
+          <p:cNvPr id="3" name="Notizenplatzhalter 2"/>
+          <p:cNvSpPr>
+            <a:spLocks noGrp="1"/>
+          </p:cNvSpPr>
+          <p:nvPr>
+            <p:ph type="body" idx="1"/>
+          </p:nvPr>
+        </p:nvSpPr>
+        <p:spPr/>
+        <p:txBody>
+          <a:bodyPr/>
+          <a:lstStyle/>
+          <a:p>
+            <a:r>
+              <a:rPr lang="de-DE" dirty="0"/>
+              <a:t>Caroline + Lisa</a:t>
+            </a:r>
+            <a:endParaRPr lang="de-AT" dirty="0"/>
+          </a:p>
+        </p:txBody>
+      </p:sp>
+      <p:sp>
+        <p:nvSpPr>
+          <p:cNvPr id="4" name="Foliennummernplatzhalter 3"/>
+          <p:cNvSpPr>
+            <a:spLocks noGrp="1"/>
+          </p:cNvSpPr>
+          <p:nvPr>
+            <p:ph type="sldNum" sz="quarter" idx="5"/>
+          </p:nvPr>
+        </p:nvSpPr>
+        <p:spPr/>
+        <p:txBody>
+          <a:bodyPr/>
+          <a:lstStyle/>
+          <a:p>
+            <a:fld id="{FF719106-3219-44FA-A2A9-3D33F309A6FB}" type="slidenum">
+              <a:rPr lang="de-AT" smtClean="0"/>
+              <a:t>19</a:t>
+            </a:fld>
+            <a:endParaRPr lang="de-AT"/>
+          </a:p>
+        </p:txBody>
+      </p:sp>
+    </p:spTree>
+    <p:extLst>
+      <p:ext uri="{BB962C8B-B14F-4D97-AF65-F5344CB8AC3E}">
+        <p14:creationId xmlns:p14="http://schemas.microsoft.com/office/powerpoint/2010/main" val="1233762714"/>
       </p:ext>
     </p:extLst>
   </p:cSld>
@@ -4637,7 +5166,7 @@
           <a:p>
             <a:r>
               <a:rPr lang="de-DE" dirty="0"/>
-              <a:t>Freddy</a:t>
+              <a:t>Lisa</a:t>
             </a:r>
             <a:endParaRPr lang="de-AT" dirty="0"/>
           </a:p>
@@ -4660,7 +5189,7 @@
           <a:p>
             <a:fld id="{FF719106-3219-44FA-A2A9-3D33F309A6FB}" type="slidenum">
               <a:rPr lang="de-AT" smtClean="0"/>
-              <a:t>4</a:t>
+              <a:t>3</a:t>
             </a:fld>
             <a:endParaRPr lang="de-AT"/>
           </a:p>
@@ -4669,7 +5198,7 @@
     </p:spTree>
     <p:extLst>
       <p:ext uri="{BB962C8B-B14F-4D97-AF65-F5344CB8AC3E}">
-        <p14:creationId xmlns:p14="http://schemas.microsoft.com/office/powerpoint/2010/main" val="1004871310"/>
+        <p14:creationId xmlns:p14="http://schemas.microsoft.com/office/powerpoint/2010/main" val="87218196"/>
       </p:ext>
     </p:extLst>
   </p:cSld>
@@ -4748,7 +5277,7 @@
           <a:p>
             <a:fld id="{FF719106-3219-44FA-A2A9-3D33F309A6FB}" type="slidenum">
               <a:rPr lang="de-AT" smtClean="0"/>
-              <a:t>5</a:t>
+              <a:t>4</a:t>
             </a:fld>
             <a:endParaRPr lang="de-AT"/>
           </a:p>
@@ -4757,7 +5286,7 @@
     </p:spTree>
     <p:extLst>
       <p:ext uri="{BB962C8B-B14F-4D97-AF65-F5344CB8AC3E}">
-        <p14:creationId xmlns:p14="http://schemas.microsoft.com/office/powerpoint/2010/main" val="2313913950"/>
+        <p14:creationId xmlns:p14="http://schemas.microsoft.com/office/powerpoint/2010/main" val="1004871310"/>
       </p:ext>
     </p:extLst>
   </p:cSld>
@@ -4836,7 +5365,7 @@
           <a:p>
             <a:fld id="{FF719106-3219-44FA-A2A9-3D33F309A6FB}" type="slidenum">
               <a:rPr lang="de-AT" smtClean="0"/>
-              <a:t>6</a:t>
+              <a:t>5</a:t>
             </a:fld>
             <a:endParaRPr lang="de-AT"/>
           </a:p>
@@ -4845,7 +5374,7 @@
     </p:spTree>
     <p:extLst>
       <p:ext uri="{BB962C8B-B14F-4D97-AF65-F5344CB8AC3E}">
-        <p14:creationId xmlns:p14="http://schemas.microsoft.com/office/powerpoint/2010/main" val="1453981194"/>
+        <p14:creationId xmlns:p14="http://schemas.microsoft.com/office/powerpoint/2010/main" val="2313913950"/>
       </p:ext>
     </p:extLst>
   </p:cSld>
@@ -4901,7 +5430,7 @@
           <a:p>
             <a:r>
               <a:rPr lang="de-DE" dirty="0"/>
-              <a:t>Jasmin</a:t>
+              <a:t>Freddy</a:t>
             </a:r>
             <a:endParaRPr lang="de-AT" dirty="0"/>
           </a:p>
@@ -4924,7 +5453,7 @@
           <a:p>
             <a:fld id="{FF719106-3219-44FA-A2A9-3D33F309A6FB}" type="slidenum">
               <a:rPr lang="de-AT" smtClean="0"/>
-              <a:t>7</a:t>
+              <a:t>6</a:t>
             </a:fld>
             <a:endParaRPr lang="de-AT"/>
           </a:p>
@@ -4933,7 +5462,7 @@
     </p:spTree>
     <p:extLst>
       <p:ext uri="{BB962C8B-B14F-4D97-AF65-F5344CB8AC3E}">
-        <p14:creationId xmlns:p14="http://schemas.microsoft.com/office/powerpoint/2010/main" val="1492730971"/>
+        <p14:creationId xmlns:p14="http://schemas.microsoft.com/office/powerpoint/2010/main" val="1453981194"/>
       </p:ext>
     </p:extLst>
   </p:cSld>
@@ -4987,6 +5516,10 @@
           <a:bodyPr/>
           <a:lstStyle/>
           <a:p>
+            <a:r>
+              <a:rPr lang="de-DE" dirty="0"/>
+              <a:t>Jasmin</a:t>
+            </a:r>
             <a:endParaRPr lang="de-AT" dirty="0"/>
           </a:p>
         </p:txBody>
@@ -5008,7 +5541,7 @@
           <a:p>
             <a:fld id="{FF719106-3219-44FA-A2A9-3D33F309A6FB}" type="slidenum">
               <a:rPr lang="de-AT" smtClean="0"/>
-              <a:t>8</a:t>
+              <a:t>7</a:t>
             </a:fld>
             <a:endParaRPr lang="de-AT"/>
           </a:p>
@@ -5017,7 +5550,7 @@
     </p:spTree>
     <p:extLst>
       <p:ext uri="{BB962C8B-B14F-4D97-AF65-F5344CB8AC3E}">
-        <p14:creationId xmlns:p14="http://schemas.microsoft.com/office/powerpoint/2010/main" val="288933696"/>
+        <p14:creationId xmlns:p14="http://schemas.microsoft.com/office/powerpoint/2010/main" val="1492730971"/>
       </p:ext>
     </p:extLst>
   </p:cSld>
@@ -5096,7 +5629,7 @@
           <a:p>
             <a:fld id="{FF719106-3219-44FA-A2A9-3D33F309A6FB}" type="slidenum">
               <a:rPr lang="de-AT" smtClean="0"/>
-              <a:t>10</a:t>
+              <a:t>8</a:t>
             </a:fld>
             <a:endParaRPr lang="de-AT"/>
           </a:p>
@@ -5105,7 +5638,7 @@
     </p:spTree>
     <p:extLst>
       <p:ext uri="{BB962C8B-B14F-4D97-AF65-F5344CB8AC3E}">
-        <p14:creationId xmlns:p14="http://schemas.microsoft.com/office/powerpoint/2010/main" val="4286800637"/>
+        <p14:creationId xmlns:p14="http://schemas.microsoft.com/office/powerpoint/2010/main" val="288933696"/>
       </p:ext>
     </p:extLst>
   </p:cSld>
@@ -5184,7 +5717,7 @@
           <a:p>
             <a:fld id="{FF719106-3219-44FA-A2A9-3D33F309A6FB}" type="slidenum">
               <a:rPr lang="de-AT" smtClean="0"/>
-              <a:t>12</a:t>
+              <a:t>9</a:t>
             </a:fld>
             <a:endParaRPr lang="de-AT"/>
           </a:p>
@@ -5193,7 +5726,7 @@
     </p:spTree>
     <p:extLst>
       <p:ext uri="{BB962C8B-B14F-4D97-AF65-F5344CB8AC3E}">
-        <p14:creationId xmlns:p14="http://schemas.microsoft.com/office/powerpoint/2010/main" val="2319155447"/>
+        <p14:creationId xmlns:p14="http://schemas.microsoft.com/office/powerpoint/2010/main" val="1618280406"/>
       </p:ext>
     </p:extLst>
   </p:cSld>
@@ -5272,7 +5805,7 @@
           <a:p>
             <a:fld id="{FF719106-3219-44FA-A2A9-3D33F309A6FB}" type="slidenum">
               <a:rPr lang="de-AT" smtClean="0"/>
-              <a:t>13</a:t>
+              <a:t>10</a:t>
             </a:fld>
             <a:endParaRPr lang="de-AT"/>
           </a:p>
@@ -5281,7 +5814,7 @@
     </p:spTree>
     <p:extLst>
       <p:ext uri="{BB962C8B-B14F-4D97-AF65-F5344CB8AC3E}">
-        <p14:creationId xmlns:p14="http://schemas.microsoft.com/office/powerpoint/2010/main" val="2639180382"/>
+        <p14:creationId xmlns:p14="http://schemas.microsoft.com/office/powerpoint/2010/main" val="4286800637"/>
       </p:ext>
     </p:extLst>
   </p:cSld>
@@ -12358,8 +12891,8 @@
         </p:blipFill>
         <p:spPr>
           <a:xfrm>
-            <a:off x="2004077" y="739455"/>
-            <a:ext cx="8182219" cy="2657619"/>
+            <a:off x="1585227" y="346364"/>
+            <a:ext cx="9021546" cy="2930236"/>
           </a:xfrm>
           <a:prstGeom prst="rect">
             <a:avLst/>
@@ -12393,8 +12926,8 @@
         </p:blipFill>
         <p:spPr bwMode="auto">
           <a:xfrm>
-            <a:off x="2004077" y="3429000"/>
-            <a:ext cx="8183846" cy="2657619"/>
+            <a:off x="1585227" y="3276600"/>
+            <a:ext cx="9023337" cy="2930235"/>
           </a:xfrm>
           <a:prstGeom prst="rect">
             <a:avLst/>
@@ -12527,7 +13060,7 @@
         </p:blipFill>
         <p:spPr>
           <a:xfrm>
-            <a:off x="1251678" y="1439048"/>
+            <a:off x="1006839" y="1483878"/>
             <a:ext cx="10178322" cy="3890243"/>
           </a:xfrm>
           <a:prstGeom prst="rect">
@@ -12565,31 +13098,6 @@
           <a:chExt cx="0" cy="0"/>
         </a:xfrm>
       </p:grpSpPr>
-      <p:sp>
-        <p:nvSpPr>
-          <p:cNvPr id="2" name="Titel 1">
-            <a:extLst>
-              <a:ext uri="{FF2B5EF4-FFF2-40B4-BE49-F238E27FC236}">
-                <a16:creationId xmlns:a16="http://schemas.microsoft.com/office/drawing/2014/main" id="{88D42DA3-BDE2-4B5D-BD6A-7E2DE0310CD3}"/>
-              </a:ext>
-            </a:extLst>
-          </p:cNvPr>
-          <p:cNvSpPr>
-            <a:spLocks noGrp="1"/>
-          </p:cNvSpPr>
-          <p:nvPr>
-            <p:ph type="title"/>
-          </p:nvPr>
-        </p:nvSpPr>
-        <p:spPr/>
-        <p:txBody>
-          <a:bodyPr/>
-          <a:lstStyle/>
-          <a:p>
-            <a:endParaRPr lang="de-AT"/>
-          </a:p>
-        </p:txBody>
-      </p:sp>
       <p:pic>
         <p:nvPicPr>
           <p:cNvPr id="4" name="Inhaltsplatzhalter 3">
@@ -12614,7 +13122,7 @@
         </p:blipFill>
         <p:spPr>
           <a:xfrm>
-            <a:off x="1251678" y="1449085"/>
+            <a:off x="1006839" y="1191389"/>
             <a:ext cx="10178322" cy="4475221"/>
           </a:xfrm>
           <a:prstGeom prst="rect">
@@ -12654,31 +13162,6 @@
       </p:grpSpPr>
       <p:sp>
         <p:nvSpPr>
-          <p:cNvPr id="2" name="Titel 1">
-            <a:extLst>
-              <a:ext uri="{FF2B5EF4-FFF2-40B4-BE49-F238E27FC236}">
-                <a16:creationId xmlns:a16="http://schemas.microsoft.com/office/drawing/2014/main" id="{533CECA9-8007-4B93-964C-AD7A405A2477}"/>
-              </a:ext>
-            </a:extLst>
-          </p:cNvPr>
-          <p:cNvSpPr>
-            <a:spLocks noGrp="1"/>
-          </p:cNvSpPr>
-          <p:nvPr>
-            <p:ph type="title"/>
-          </p:nvPr>
-        </p:nvSpPr>
-        <p:spPr/>
-        <p:txBody>
-          <a:bodyPr/>
-          <a:lstStyle/>
-          <a:p>
-            <a:endParaRPr lang="de-AT"/>
-          </a:p>
-        </p:txBody>
-      </p:sp>
-      <p:sp>
-        <p:nvSpPr>
           <p:cNvPr id="3" name="Inhaltsplatzhalter 2">
             <a:extLst>
               <a:ext uri="{FF2B5EF4-FFF2-40B4-BE49-F238E27FC236}">
@@ -12724,7 +13207,7 @@
         </p:blipFill>
         <p:spPr>
           <a:xfrm>
-            <a:off x="1251679" y="1046691"/>
+            <a:off x="1006839" y="633278"/>
             <a:ext cx="10178322" cy="5591444"/>
           </a:xfrm>
           <a:prstGeom prst="rect">
@@ -12767,6 +13250,70 @@
           <p:cNvPr id="2" name="Titel 1">
             <a:extLst>
               <a:ext uri="{FF2B5EF4-FFF2-40B4-BE49-F238E27FC236}">
+                <a16:creationId xmlns:a16="http://schemas.microsoft.com/office/drawing/2014/main" id="{A63D7104-FFDF-48E8-8338-5AC2D8343BC0}"/>
+              </a:ext>
+            </a:extLst>
+          </p:cNvPr>
+          <p:cNvSpPr>
+            <a:spLocks noGrp="1"/>
+          </p:cNvSpPr>
+          <p:nvPr>
+            <p:ph type="title"/>
+          </p:nvPr>
+        </p:nvSpPr>
+        <p:spPr>
+          <a:xfrm>
+            <a:off x="1006839" y="2682934"/>
+            <a:ext cx="10178322" cy="1492132"/>
+          </a:xfrm>
+        </p:spPr>
+        <p:txBody>
+          <a:bodyPr/>
+          <a:lstStyle/>
+          <a:p>
+            <a:r>
+              <a:rPr lang="de-DE" dirty="0" err="1"/>
+              <a:t>Testing</a:t>
+            </a:r>
+            <a:endParaRPr lang="de-AT" dirty="0"/>
+          </a:p>
+        </p:txBody>
+      </p:sp>
+    </p:spTree>
+    <p:extLst>
+      <p:ext uri="{BB962C8B-B14F-4D97-AF65-F5344CB8AC3E}">
+        <p14:creationId xmlns:p14="http://schemas.microsoft.com/office/powerpoint/2010/main" val="1843263544"/>
+      </p:ext>
+    </p:extLst>
+  </p:cSld>
+  <p:clrMapOvr>
+    <a:masterClrMapping/>
+  </p:clrMapOvr>
+</p:sld>
+</file>
+
+<file path=ppt/slides/slide18.xml><?xml version="1.0" encoding="utf-8"?>
+<p:sld xmlns:a="http://schemas.openxmlformats.org/drawingml/2006/main" xmlns:r="http://schemas.openxmlformats.org/officeDocument/2006/relationships" xmlns:p="http://schemas.openxmlformats.org/presentationml/2006/main">
+  <p:cSld>
+    <p:spTree>
+      <p:nvGrpSpPr>
+        <p:cNvPr id="1" name=""/>
+        <p:cNvGrpSpPr/>
+        <p:nvPr/>
+      </p:nvGrpSpPr>
+      <p:grpSpPr>
+        <a:xfrm>
+          <a:off x="0" y="0"/>
+          <a:ext cx="0" cy="0"/>
+          <a:chOff x="0" y="0"/>
+          <a:chExt cx="0" cy="0"/>
+        </a:xfrm>
+      </p:grpSpPr>
+      <p:sp>
+        <p:nvSpPr>
+          <p:cNvPr id="2" name="Titel 1">
+            <a:extLst>
+              <a:ext uri="{FF2B5EF4-FFF2-40B4-BE49-F238E27FC236}">
                 <a16:creationId xmlns:a16="http://schemas.microsoft.com/office/drawing/2014/main" id="{E9E6F8BE-2AB5-45F9-B211-0543BAB6A390}"/>
               </a:ext>
             </a:extLst>
@@ -12814,6 +13361,23 @@
           <a:p>
             <a:r>
               <a:rPr lang="de-DE" dirty="0"/>
+              <a:t>Positiv</a:t>
+            </a:r>
+          </a:p>
+          <a:p>
+            <a:pPr lvl="1"/>
+            <a:r>
+              <a:rPr lang="de-AT" dirty="0"/>
+              <a:t>Teammeetings (Ende und Anfang)</a:t>
+            </a:r>
+          </a:p>
+          <a:p>
+            <a:pPr lvl="1"/>
+            <a:endParaRPr lang="de-AT" dirty="0"/>
+          </a:p>
+          <a:p>
+            <a:r>
+              <a:rPr lang="de-DE" dirty="0"/>
               <a:t>Negativ</a:t>
             </a:r>
           </a:p>
@@ -12859,19 +13423,6 @@
             <a:endParaRPr lang="de-DE" dirty="0"/>
           </a:p>
           <a:p>
-            <a:r>
-              <a:rPr lang="de-DE" dirty="0"/>
-              <a:t>Positiv</a:t>
-            </a:r>
-          </a:p>
-          <a:p>
-            <a:pPr lvl="1"/>
-            <a:r>
-              <a:rPr lang="de-AT" dirty="0"/>
-              <a:t>Teammeetings (Ende und Anfang)</a:t>
-            </a:r>
-          </a:p>
-          <a:p>
             <a:pPr lvl="1"/>
             <a:endParaRPr lang="de-AT" dirty="0"/>
           </a:p>
@@ -12890,7 +13441,7 @@
 </p:sld>
 </file>
 
-<file path=ppt/slides/slide18.xml><?xml version="1.0" encoding="utf-8"?>
+<file path=ppt/slides/slide19.xml><?xml version="1.0" encoding="utf-8"?>
 <p:sld xmlns:a="http://schemas.openxmlformats.org/drawingml/2006/main" xmlns:r="http://schemas.openxmlformats.org/officeDocument/2006/relationships" xmlns:p="http://schemas.openxmlformats.org/presentationml/2006/main">
   <p:cSld>
     <p:spTree>
@@ -13190,7 +13741,7 @@
           <p:nvPr/>
         </p:nvPicPr>
         <p:blipFill>
-          <a:blip r:embed="rId2">
+          <a:blip r:embed="rId3">
             <a:extLst>
               <a:ext uri="{28A0092B-C50C-407E-A947-70E740481C1C}">
                 <a14:useLocalDpi xmlns:a14="http://schemas.microsoft.com/office/drawing/2010/main" val="0"/>
@@ -13490,7 +14041,7 @@
           <p:nvPr/>
         </p:nvPicPr>
         <p:blipFill>
-          <a:blip r:embed="rId3">
+          <a:blip r:embed="rId4">
             <a:extLst>
               <a:ext uri="{28A0092B-C50C-407E-A947-70E740481C1C}">
                 <a14:useLocalDpi xmlns:a14="http://schemas.microsoft.com/office/drawing/2010/main" val="0"/>
@@ -13537,7 +14088,7 @@
           <p:nvPr/>
         </p:nvPicPr>
         <p:blipFill rotWithShape="1">
-          <a:blip r:embed="rId4">
+          <a:blip r:embed="rId5">
             <a:extLst>
               <a:ext uri="{28A0092B-C50C-407E-A947-70E740481C1C}">
                 <a14:useLocalDpi xmlns:a14="http://schemas.microsoft.com/office/drawing/2010/main" val="0"/>
@@ -13582,7 +14133,7 @@
           <p:nvPr/>
         </p:nvPicPr>
         <p:blipFill rotWithShape="1">
-          <a:blip r:embed="rId5">
+          <a:blip r:embed="rId6">
             <a:extLst>
               <a:ext uri="{28A0092B-C50C-407E-A947-70E740481C1C}">
                 <a14:useLocalDpi xmlns:a14="http://schemas.microsoft.com/office/drawing/2010/main" val="0"/>
@@ -13627,7 +14178,7 @@
           <p:nvPr/>
         </p:nvPicPr>
         <p:blipFill>
-          <a:blip r:embed="rId6">
+          <a:blip r:embed="rId7">
             <a:extLst>
               <a:ext uri="{28A0092B-C50C-407E-A947-70E740481C1C}">
                 <a14:useLocalDpi xmlns:a14="http://schemas.microsoft.com/office/drawing/2010/main" val="0"/>
@@ -13744,7 +14295,7 @@
         </p:nvSpPr>
         <p:spPr>
           <a:xfrm>
-            <a:off x="6251189" y="2378270"/>
+            <a:off x="6278899" y="2664232"/>
             <a:ext cx="3961590" cy="3593591"/>
           </a:xfrm>
         </p:spPr>
@@ -13760,16 +14311,6 @@
                 <a:cs typeface="Calibri"/>
               </a:rPr>
               <a:t>Nur Legale Newsletter</a:t>
-            </a:r>
-          </a:p>
-          <a:p>
-            <a:pPr lvl="1"/>
-            <a:r>
-              <a:rPr lang="de-DE" dirty="0">
-                <a:ea typeface="Calibri"/>
-                <a:cs typeface="Calibri"/>
-              </a:rPr>
-              <a:t>Was ist mit legal gemeint?</a:t>
             </a:r>
           </a:p>
           <a:p>
@@ -13918,6 +14459,105 @@
           </a:prstGeom>
         </p:spPr>
       </p:pic>
+      <p:pic>
+        <p:nvPicPr>
+          <p:cNvPr id="1026" name="Picture 2">
+            <a:extLst>
+              <a:ext uri="{FF2B5EF4-FFF2-40B4-BE49-F238E27FC236}">
+                <a16:creationId xmlns:a16="http://schemas.microsoft.com/office/drawing/2014/main" id="{9FAB6E41-5EA6-48D7-B769-1A83888CB22F}"/>
+              </a:ext>
+            </a:extLst>
+          </p:cNvPr>
+          <p:cNvPicPr>
+            <a:picLocks noChangeAspect="1" noChangeArrowheads="1"/>
+          </p:cNvPicPr>
+          <p:nvPr/>
+        </p:nvPicPr>
+        <p:blipFill>
+          <a:blip r:embed="rId5">
+            <a:extLst>
+              <a:ext uri="{28A0092B-C50C-407E-A947-70E740481C1C}">
+                <a14:useLocalDpi xmlns:a14="http://schemas.microsoft.com/office/drawing/2010/main" val="0"/>
+              </a:ext>
+            </a:extLst>
+          </a:blip>
+          <a:srcRect/>
+          <a:stretch>
+            <a:fillRect/>
+          </a:stretch>
+        </p:blipFill>
+        <p:spPr bwMode="auto">
+          <a:xfrm>
+            <a:off x="2575298" y="3804650"/>
+            <a:ext cx="852393" cy="852393"/>
+          </a:xfrm>
+          <a:prstGeom prst="rect">
+            <a:avLst/>
+          </a:prstGeom>
+          <a:noFill/>
+          <a:extLst>
+            <a:ext uri="{909E8E84-426E-40DD-AFC4-6F175D3DCCD1}">
+              <a14:hiddenFill xmlns:a14="http://schemas.microsoft.com/office/drawing/2010/main">
+                <a:solidFill>
+                  <a:srgbClr val="FFFFFF"/>
+                </a:solidFill>
+              </a14:hiddenFill>
+            </a:ext>
+          </a:extLst>
+        </p:spPr>
+      </p:pic>
+      <p:sp>
+        <p:nvSpPr>
+          <p:cNvPr id="3" name="Textfeld 2">
+            <a:extLst>
+              <a:ext uri="{FF2B5EF4-FFF2-40B4-BE49-F238E27FC236}">
+                <a16:creationId xmlns:a16="http://schemas.microsoft.com/office/drawing/2014/main" id="{890D89A3-7186-447C-B78E-D3F94A8F2762}"/>
+              </a:ext>
+            </a:extLst>
+          </p:cNvPr>
+          <p:cNvSpPr txBox="1"/>
+          <p:nvPr/>
+        </p:nvSpPr>
+        <p:spPr>
+          <a:xfrm>
+            <a:off x="1219200" y="4046181"/>
+            <a:ext cx="1330036" cy="369332"/>
+          </a:xfrm>
+          <a:prstGeom prst="rect">
+            <a:avLst/>
+          </a:prstGeom>
+          <a:noFill/>
+        </p:spPr>
+        <p:txBody>
+          <a:bodyPr wrap="square" rtlCol="0">
+            <a:spAutoFit/>
+          </a:bodyPr>
+          <a:lstStyle/>
+          <a:p>
+            <a:r>
+              <a:rPr lang="de-DE" dirty="0" err="1">
+                <a:solidFill>
+                  <a:srgbClr val="7C7C7C"/>
+                </a:solidFill>
+              </a:rPr>
+              <a:t>Created</a:t>
+            </a:r>
+            <a:r>
+              <a:rPr lang="de-DE" dirty="0">
+                <a:solidFill>
+                  <a:srgbClr val="7C7C7C"/>
+                </a:solidFill>
+              </a:rPr>
+              <a:t> in:</a:t>
+            </a:r>
+            <a:endParaRPr lang="de-AT" dirty="0">
+              <a:solidFill>
+                <a:srgbClr val="7C7C7C"/>
+              </a:solidFill>
+            </a:endParaRPr>
+          </a:p>
+        </p:txBody>
+      </p:sp>
     </p:spTree>
     <p:extLst>
       <p:ext uri="{BB962C8B-B14F-4D97-AF65-F5344CB8AC3E}">
